--- a/zero_calibration_bpm/manuscripts/TIM_Figures_EN.pptx
+++ b/zero_calibration_bpm/manuscripts/TIM_Figures_EN.pptx
@@ -3677,7 +3677,7 @@
           <a:p>
             <a:r>
               <a:rPr sz="1300" i="1"/>
-              <a:t>For one fixed device, the CCC and the bias-correction factor C_b increase as the sampled pressure range widens, while the scale shift v stays close to the true gain ratio.</a:t>
+              <a:t>For one fixed device, the CCC and the bias-correction factor C_b increase as the sampled pressure range widens, while the scale shift v is less range-dependent and approaches the true gain ratio at wider ranges.</a:t>
             </a:r>
           </a:p>
         </p:txBody>
